--- a/templates/warm-coral.pptx
+++ b/templates/warm-coral.pptx
@@ -107,6 +107,11 @@
       </a:defRPr>
     </a:lvl9pPr>
   </p:defaultTextStyle>
+  <p:extLst>
+    <p:ext uri="{EFAFB233-063F-42B5-8137-9DF3F51BA10A}">
+      <p15:sldGuideLst xmlns:p15="http://schemas.microsoft.com/office/powerpoint/2012/main"/>
+    </p:ext>
+  </p:extLst>
 </p:presentation>
 </file>
 
@@ -225,6 +230,61 @@
       </p:grpSpPr>
       <p:sp>
         <p:nvSpPr>
+          <p:cNvPr id="4" name="Rectangle 3">
+            <a:extLst>
+              <a:ext uri="{FF2B5EF4-FFF2-40B4-BE49-F238E27FC236}">
+                <a16:creationId xmlns:a16="http://schemas.microsoft.com/office/drawing/2014/main" id="{24C42E16-DF47-0F79-C7C4-38718280C131}"/>
+              </a:ext>
+            </a:extLst>
+          </p:cNvPr>
+          <p:cNvSpPr/>
+          <p:nvPr userDrawn="1"/>
+        </p:nvSpPr>
+        <p:spPr>
+          <a:xfrm>
+            <a:off x="0" y="35609"/>
+            <a:ext cx="12192000" cy="1728000"/>
+          </a:xfrm>
+          <a:prstGeom prst="rect">
+            <a:avLst/>
+          </a:prstGeom>
+          <a:solidFill>
+            <a:schemeClr val="accent3">
+              <a:lumMod val="20000"/>
+              <a:lumOff val="80000"/>
+            </a:schemeClr>
+          </a:solidFill>
+          <a:ln>
+            <a:noFill/>
+          </a:ln>
+        </p:spPr>
+        <p:style>
+          <a:lnRef idx="2">
+            <a:schemeClr val="accent1">
+              <a:shade val="15000"/>
+            </a:schemeClr>
+          </a:lnRef>
+          <a:fillRef idx="1">
+            <a:schemeClr val="accent1"/>
+          </a:fillRef>
+          <a:effectRef idx="0">
+            <a:schemeClr val="accent1"/>
+          </a:effectRef>
+          <a:fontRef idx="minor">
+            <a:schemeClr val="lt1"/>
+          </a:fontRef>
+        </p:style>
+        <p:txBody>
+          <a:bodyPr rtlCol="0" anchor="ctr"/>
+          <a:lstStyle/>
+          <a:p>
+            <a:pPr algn="ctr"/>
+            <a:endParaRPr lang="en-AU"/>
+          </a:p>
+        </p:txBody>
+      </p:sp>
+      <p:sp>
+        <p:nvSpPr>
           <p:cNvPr id="2" name="title"/>
           <p:cNvSpPr>
             <a:spLocks noGrp="1"/>
@@ -323,6 +383,61 @@
       </p:grpSpPr>
       <p:sp>
         <p:nvSpPr>
+          <p:cNvPr id="5" name="Rectangle 4">
+            <a:extLst>
+              <a:ext uri="{FF2B5EF4-FFF2-40B4-BE49-F238E27FC236}">
+                <a16:creationId xmlns:a16="http://schemas.microsoft.com/office/drawing/2014/main" id="{334B7BE0-E9EA-39CF-DF4C-2F0BF9E19A6D}"/>
+              </a:ext>
+            </a:extLst>
+          </p:cNvPr>
+          <p:cNvSpPr/>
+          <p:nvPr userDrawn="1"/>
+        </p:nvSpPr>
+        <p:spPr>
+          <a:xfrm>
+            <a:off x="0" y="35609"/>
+            <a:ext cx="12192000" cy="1728000"/>
+          </a:xfrm>
+          <a:prstGeom prst="rect">
+            <a:avLst/>
+          </a:prstGeom>
+          <a:solidFill>
+            <a:schemeClr val="accent3">
+              <a:lumMod val="20000"/>
+              <a:lumOff val="80000"/>
+            </a:schemeClr>
+          </a:solidFill>
+          <a:ln>
+            <a:noFill/>
+          </a:ln>
+        </p:spPr>
+        <p:style>
+          <a:lnRef idx="2">
+            <a:schemeClr val="accent1">
+              <a:shade val="15000"/>
+            </a:schemeClr>
+          </a:lnRef>
+          <a:fillRef idx="1">
+            <a:schemeClr val="accent1"/>
+          </a:fillRef>
+          <a:effectRef idx="0">
+            <a:schemeClr val="accent1"/>
+          </a:effectRef>
+          <a:fontRef idx="minor">
+            <a:schemeClr val="lt1"/>
+          </a:fontRef>
+        </p:style>
+        <p:txBody>
+          <a:bodyPr rtlCol="0" anchor="ctr"/>
+          <a:lstStyle/>
+          <a:p>
+            <a:pPr algn="ctr"/>
+            <a:endParaRPr lang="en-AU"/>
+          </a:p>
+        </p:txBody>
+      </p:sp>
+      <p:sp>
+        <p:nvSpPr>
           <p:cNvPr id="2" name="title"/>
           <p:cNvSpPr>
             <a:spLocks noGrp="1"/>
@@ -620,6 +735,61 @@
           <a:chExt cx="0" cy="0"/>
         </a:xfrm>
       </p:grpSpPr>
+      <p:sp>
+        <p:nvSpPr>
+          <p:cNvPr id="2" name="Rectangle 1">
+            <a:extLst>
+              <a:ext uri="{FF2B5EF4-FFF2-40B4-BE49-F238E27FC236}">
+                <a16:creationId xmlns:a16="http://schemas.microsoft.com/office/drawing/2014/main" id="{1DEC7E03-C50B-7F25-9E04-3A63D26D7B60}"/>
+              </a:ext>
+            </a:extLst>
+          </p:cNvPr>
+          <p:cNvSpPr/>
+          <p:nvPr userDrawn="1"/>
+        </p:nvSpPr>
+        <p:spPr>
+          <a:xfrm>
+            <a:off x="0" y="35609"/>
+            <a:ext cx="12192000" cy="1728000"/>
+          </a:xfrm>
+          <a:prstGeom prst="rect">
+            <a:avLst/>
+          </a:prstGeom>
+          <a:solidFill>
+            <a:schemeClr val="accent3">
+              <a:lumMod val="20000"/>
+              <a:lumOff val="80000"/>
+            </a:schemeClr>
+          </a:solidFill>
+          <a:ln>
+            <a:noFill/>
+          </a:ln>
+        </p:spPr>
+        <p:style>
+          <a:lnRef idx="2">
+            <a:schemeClr val="accent1">
+              <a:shade val="15000"/>
+            </a:schemeClr>
+          </a:lnRef>
+          <a:fillRef idx="1">
+            <a:schemeClr val="accent1"/>
+          </a:fillRef>
+          <a:effectRef idx="0">
+            <a:schemeClr val="accent1"/>
+          </a:effectRef>
+          <a:fontRef idx="minor">
+            <a:schemeClr val="lt1"/>
+          </a:fontRef>
+        </p:style>
+        <p:txBody>
+          <a:bodyPr rtlCol="0" anchor="ctr"/>
+          <a:lstStyle/>
+          <a:p>
+            <a:pPr algn="ctr"/>
+            <a:endParaRPr lang="en-AU"/>
+          </a:p>
+        </p:txBody>
+      </p:sp>
     </p:spTree>
   </p:cSld>
   <p:clrMapOvr>
@@ -779,8 +949,9 @@
           <a:p>
             <a:fld id="{A1B2C3D4-E5F6-7890-ABCD-EF1234567890}" type="datetimeFigureOut">
               <a:rPr lang="en-US"/>
-              <a:t>1/1/2000</a:t>
+              <a:t>4/4/26</a:t>
             </a:fld>
+            <a:endParaRPr lang="en-US"/>
           </a:p>
         </p:txBody>
       </p:sp>
@@ -854,6 +1025,7 @@
               <a:rPr lang="en-US"/>
               <a:t>‹#›</a:t>
             </a:fld>
+            <a:endParaRPr lang="en-US"/>
           </a:p>
         </p:txBody>
       </p:sp>
@@ -864,9 +1036,9 @@
           <p:nvPr/>
         </p:nvSpPr>
         <p:spPr>
-          <a:xfrm>
-            <a:off x="0" y="0"/>
-            <a:ext cx="228600" cy="6858000"/>
+          <a:xfrm rot="5400000">
+            <a:off x="6073140" y="-6073140"/>
+            <a:ext cx="45719" cy="12192000"/>
           </a:xfrm>
           <a:prstGeom prst="rect">
             <a:avLst/>

--- a/templates/warm-coral.pptx
+++ b/templates/warm-coral.pptx
@@ -107,11 +107,6 @@
       </a:defRPr>
     </a:lvl9pPr>
   </p:defaultTextStyle>
-  <p:extLst>
-    <p:ext uri="{EFAFB233-063F-42B5-8137-9DF3F51BA10A}">
-      <p15:sldGuideLst xmlns:p15="http://schemas.microsoft.com/office/powerpoint/2012/main"/>
-    </p:ext>
-  </p:extLst>
 </p:presentation>
 </file>
 
@@ -230,61 +225,6 @@
       </p:grpSpPr>
       <p:sp>
         <p:nvSpPr>
-          <p:cNvPr id="4" name="Rectangle 3">
-            <a:extLst>
-              <a:ext uri="{FF2B5EF4-FFF2-40B4-BE49-F238E27FC236}">
-                <a16:creationId xmlns:a16="http://schemas.microsoft.com/office/drawing/2014/main" id="{24C42E16-DF47-0F79-C7C4-38718280C131}"/>
-              </a:ext>
-            </a:extLst>
-          </p:cNvPr>
-          <p:cNvSpPr/>
-          <p:nvPr userDrawn="1"/>
-        </p:nvSpPr>
-        <p:spPr>
-          <a:xfrm>
-            <a:off x="0" y="35609"/>
-            <a:ext cx="12192000" cy="1728000"/>
-          </a:xfrm>
-          <a:prstGeom prst="rect">
-            <a:avLst/>
-          </a:prstGeom>
-          <a:solidFill>
-            <a:schemeClr val="accent3">
-              <a:lumMod val="20000"/>
-              <a:lumOff val="80000"/>
-            </a:schemeClr>
-          </a:solidFill>
-          <a:ln>
-            <a:noFill/>
-          </a:ln>
-        </p:spPr>
-        <p:style>
-          <a:lnRef idx="2">
-            <a:schemeClr val="accent1">
-              <a:shade val="15000"/>
-            </a:schemeClr>
-          </a:lnRef>
-          <a:fillRef idx="1">
-            <a:schemeClr val="accent1"/>
-          </a:fillRef>
-          <a:effectRef idx="0">
-            <a:schemeClr val="accent1"/>
-          </a:effectRef>
-          <a:fontRef idx="minor">
-            <a:schemeClr val="lt1"/>
-          </a:fontRef>
-        </p:style>
-        <p:txBody>
-          <a:bodyPr rtlCol="0" anchor="ctr"/>
-          <a:lstStyle/>
-          <a:p>
-            <a:pPr algn="ctr"/>
-            <a:endParaRPr lang="en-AU"/>
-          </a:p>
-        </p:txBody>
-      </p:sp>
-      <p:sp>
-        <p:nvSpPr>
           <p:cNvPr id="2" name="title"/>
           <p:cNvSpPr>
             <a:spLocks noGrp="1"/>
@@ -383,61 +323,6 @@
       </p:grpSpPr>
       <p:sp>
         <p:nvSpPr>
-          <p:cNvPr id="5" name="Rectangle 4">
-            <a:extLst>
-              <a:ext uri="{FF2B5EF4-FFF2-40B4-BE49-F238E27FC236}">
-                <a16:creationId xmlns:a16="http://schemas.microsoft.com/office/drawing/2014/main" id="{334B7BE0-E9EA-39CF-DF4C-2F0BF9E19A6D}"/>
-              </a:ext>
-            </a:extLst>
-          </p:cNvPr>
-          <p:cNvSpPr/>
-          <p:nvPr userDrawn="1"/>
-        </p:nvSpPr>
-        <p:spPr>
-          <a:xfrm>
-            <a:off x="0" y="35609"/>
-            <a:ext cx="12192000" cy="1728000"/>
-          </a:xfrm>
-          <a:prstGeom prst="rect">
-            <a:avLst/>
-          </a:prstGeom>
-          <a:solidFill>
-            <a:schemeClr val="accent3">
-              <a:lumMod val="20000"/>
-              <a:lumOff val="80000"/>
-            </a:schemeClr>
-          </a:solidFill>
-          <a:ln>
-            <a:noFill/>
-          </a:ln>
-        </p:spPr>
-        <p:style>
-          <a:lnRef idx="2">
-            <a:schemeClr val="accent1">
-              <a:shade val="15000"/>
-            </a:schemeClr>
-          </a:lnRef>
-          <a:fillRef idx="1">
-            <a:schemeClr val="accent1"/>
-          </a:fillRef>
-          <a:effectRef idx="0">
-            <a:schemeClr val="accent1"/>
-          </a:effectRef>
-          <a:fontRef idx="minor">
-            <a:schemeClr val="lt1"/>
-          </a:fontRef>
-        </p:style>
-        <p:txBody>
-          <a:bodyPr rtlCol="0" anchor="ctr"/>
-          <a:lstStyle/>
-          <a:p>
-            <a:pPr algn="ctr"/>
-            <a:endParaRPr lang="en-AU"/>
-          </a:p>
-        </p:txBody>
-      </p:sp>
-      <p:sp>
-        <p:nvSpPr>
           <p:cNvPr id="2" name="title"/>
           <p:cNvSpPr>
             <a:spLocks noGrp="1"/>
@@ -735,58 +620,50 @@
           <a:chExt cx="0" cy="0"/>
         </a:xfrm>
       </p:grpSpPr>
-      <p:sp>
-        <p:nvSpPr>
-          <p:cNvPr id="2" name="Rectangle 1">
-            <a:extLst>
-              <a:ext uri="{FF2B5EF4-FFF2-40B4-BE49-F238E27FC236}">
-                <a16:creationId xmlns:a16="http://schemas.microsoft.com/office/drawing/2014/main" id="{1DEC7E03-C50B-7F25-9E04-3A63D26D7B60}"/>
-              </a:ext>
-            </a:extLst>
-          </p:cNvPr>
-          <p:cNvSpPr/>
-          <p:nvPr userDrawn="1"/>
-        </p:nvSpPr>
-        <p:spPr>
-          <a:xfrm>
-            <a:off x="0" y="35609"/>
-            <a:ext cx="12192000" cy="1728000"/>
-          </a:xfrm>
-          <a:prstGeom prst="rect">
-            <a:avLst/>
-          </a:prstGeom>
-          <a:solidFill>
-            <a:schemeClr val="accent3">
-              <a:lumMod val="20000"/>
-              <a:lumOff val="80000"/>
-            </a:schemeClr>
-          </a:solidFill>
-          <a:ln>
-            <a:noFill/>
-          </a:ln>
-        </p:spPr>
-        <p:style>
-          <a:lnRef idx="2">
-            <a:schemeClr val="accent1">
-              <a:shade val="15000"/>
-            </a:schemeClr>
-          </a:lnRef>
-          <a:fillRef idx="1">
-            <a:schemeClr val="accent1"/>
-          </a:fillRef>
-          <a:effectRef idx="0">
-            <a:schemeClr val="accent1"/>
-          </a:effectRef>
-          <a:fontRef idx="minor">
-            <a:schemeClr val="lt1"/>
-          </a:fontRef>
-        </p:style>
-        <p:txBody>
-          <a:bodyPr rtlCol="0" anchor="ctr"/>
+    </p:spTree>
+  </p:cSld>
+  <p:clrMapOvr>
+    <a:masterClrMapping/>
+  </p:clrMapOvr>
+</p:sldLayout>
+</file>
+
+<file path=ppt/slideLayouts/slideLayout7.xml><?xml version="1.0" encoding="utf-8"?>
+<p:sldLayout xmlns:a="http://schemas.openxmlformats.org/drawingml/2006/main" xmlns:r="http://schemas.openxmlformats.org/officeDocument/2006/relationships" xmlns:p="http://schemas.openxmlformats.org/presentationml/2006/main" preserve="1" userDrawn="1">
+  <p:cSld name="Blank + Title">
+    <p:spTree>
+      <p:nvGrpSpPr>
+        <p:cNvPr id="1" name=""/>
+        <p:cNvGrpSpPr/>
+        <p:nvPr/>
+      </p:nvGrpSpPr>
+      <p:grpSpPr>
+        <a:xfrm>
+          <a:off x="0" y="0"/>
+          <a:ext cx="0" cy="0"/>
+          <a:chOff x="0" y="0"/>
+          <a:chExt cx="0" cy="0"/>
+        </a:xfrm>
+      </p:grpSpPr>
+      <p:sp>
+        <p:nvSpPr>
+          <p:cNvPr id="2" name="title"/>
+          <p:cNvSpPr>
+            <a:spLocks noGrp="1"/>
+          </p:cNvSpPr>
+          <p:nvPr>
+            <p:ph type="title"/>
+          </p:nvPr>
+        </p:nvSpPr>
+        <p:spPr/>
+        <p:txBody>
+          <a:bodyPr/>
           <a:lstStyle/>
           <a:p>
-            <a:pPr algn="ctr"/>
-            <a:endParaRPr lang="en-AU"/>
+            <a:r>
+              <a:rPr lang="en-US"/>
+              <a:t>Click to edit Master title style</a:t>
+            </a:r>
           </a:p>
         </p:txBody>
       </p:sp>
@@ -949,9 +826,8 @@
           <a:p>
             <a:fld id="{A1B2C3D4-E5F6-7890-ABCD-EF1234567890}" type="datetimeFigureOut">
               <a:rPr lang="en-US"/>
-              <a:t>4/4/26</a:t>
+              <a:t>1/1/2000</a:t>
             </a:fld>
-            <a:endParaRPr lang="en-US"/>
           </a:p>
         </p:txBody>
       </p:sp>
@@ -1025,7 +901,6 @@
               <a:rPr lang="en-US"/>
               <a:t>‹#›</a:t>
             </a:fld>
-            <a:endParaRPr lang="en-US"/>
           </a:p>
         </p:txBody>
       </p:sp>
@@ -1036,9 +911,9 @@
           <p:nvPr/>
         </p:nvSpPr>
         <p:spPr>
-          <a:xfrm rot="5400000">
-            <a:off x="6073140" y="-6073140"/>
-            <a:ext cx="45719" cy="12192000"/>
+          <a:xfrm>
+            <a:off x="0" y="0"/>
+            <a:ext cx="228600" cy="6858000"/>
           </a:xfrm>
           <a:prstGeom prst="rect">
             <a:avLst/>
@@ -1068,6 +943,7 @@
     <p:sldLayoutId id="2147483652" r:id="rId4"/>
     <p:sldLayoutId id="2147483653" r:id="rId5"/>
     <p:sldLayoutId id="2147483654" r:id="rId6"/>
+    <p:sldLayoutId id="2147483655" r:id="rId7"/>
   </p:sldLayoutIdLst>
   <p:txStyles>
     <p:titleStyle>

--- a/templates/warm-coral.pptx
+++ b/templates/warm-coral.pptx
@@ -474,7 +474,7 @@
       </p:sp>
       <p:sp>
         <p:nvSpPr>
-          <p:cNvPr id="3" name="body"/>
+          <p:cNvPr id="3" name="Section Number"/>
           <p:cNvSpPr>
             <a:spLocks noGrp="1"/>
           </p:cNvSpPr>

--- a/templates/warm-coral.pptx
+++ b/templates/warm-coral.pptx
@@ -474,7 +474,7 @@
       </p:sp>
       <p:sp>
         <p:nvSpPr>
-          <p:cNvPr id="3" name="Section Number"/>
+          <p:cNvPr id="3" name="body"/>
           <p:cNvSpPr>
             <a:spLocks noGrp="1"/>
           </p:cNvSpPr>

--- a/templates/warm-coral.pptx
+++ b/templates/warm-coral.pptx
@@ -474,7 +474,7 @@
       </p:sp>
       <p:sp>
         <p:nvSpPr>
-          <p:cNvPr id="3" name="body"/>
+          <p:cNvPr id="3" name="Section Number"/>
           <p:cNvSpPr>
             <a:spLocks noGrp="1"/>
           </p:cNvSpPr>
@@ -491,9 +491,13 @@
         <p:txBody>
           <a:bodyPr/>
           <a:lstStyle>
-            <a:lvl1pPr marL="11113" indent="-11113">
+            <a:lvl1pPr marL="11113" indent="-11113" algn="r">
               <a:buNone/>
-              <a:defRPr sz="9600"/>
+              <a:defRPr sz="13600">
+                <a:solidFill>
+                  <a:schemeClr val="accent1"/>
+                </a:solidFill>
+              </a:defRPr>
             </a:lvl1pPr>
           </a:lstStyle>
           <a:p>
@@ -906,14 +910,14 @@
       </p:sp>
       <p:sp>
         <p:nvSpPr>
-          <p:cNvPr id="7" name="Accent Bar"/>
+          <p:cNvPr id="7" name="Top Bar"/>
           <p:cNvSpPr/>
           <p:nvPr/>
         </p:nvSpPr>
         <p:spPr>
           <a:xfrm>
             <a:off x="0" y="0"/>
-            <a:ext cx="228600" cy="6858000"/>
+            <a:ext cx="12192000" cy="352425"/>
           </a:xfrm>
           <a:prstGeom prst="rect">
             <a:avLst/>
